--- a/report/Academic_presentation_structure.pptx
+++ b/report/Academic_presentation_structure.pptx
@@ -600,7 +600,7 @@
           <a:p>
             <a:r>
               <a:rPr lang="en-US" dirty="0"/>
-              <a:t>Separate GPU passes, n=500 and n=200 - not the shared subset. Student matches teacher F1 with lower bias, partially rejecting H2.</a:t>
+              <a:t>Separate GPU passes, n=500 and n=200 - not the shared subset. Under the Colab protocol the student matches the teacher's F1 with lower bias; H2 is rejected on fairness.</a:t>
             </a:r>
             <a:endParaRPr lang="en-US" dirty="0"/>
           </a:p>
@@ -688,7 +688,7 @@
           <a:p>
             <a:r>
               <a:rPr lang="en-US" dirty="0"/>
-              <a:t>Five conclusions, then the two main limitations: n=800 headline subset, and hateBERT was not run.</a:t>
+              <a:t>Six conclusions, then the two main limitations: n=800 headline subset, and hateBERT was not run.</a:t>
             </a:r>
             <a:endParaRPr lang="en-US" dirty="0"/>
           </a:p>
@@ -1216,7 +1216,7 @@
           <a:p>
             <a:r>
               <a:rPr lang="en-US" dirty="0"/>
-              <a:t>Control FPR is exactly zero for every classifier. So the false positives are identity-driven, not length- or template-driven. Note E1 is the worst non-degenerate model.</a:t>
+              <a:t>Control FPR is exactly zero for every classifier. So the false positives are identity-driven, not length- or template-driven. The one unambiguous gap is the student S1: 3 flagged sentences against its teacher's 32.</a:t>
             </a:r>
             <a:endParaRPr lang="en-US" dirty="0"/>
           </a:p>
@@ -3687,7 +3687,7 @@
         </p:nvSpPr>
         <p:spPr>
           <a:xfrm>
-            <a:off x="952500" y="7521178"/>
+            <a:off x="952500" y="6121178"/>
             <a:ext cx="8717280" cy="361950"/>
           </a:xfrm>
           <a:prstGeom prst="rect">
@@ -3728,7 +3728,7 @@
         </p:nvSpPr>
         <p:spPr>
           <a:xfrm>
-            <a:off x="952500" y="7978378"/>
+            <a:off x="952500" y="6578378"/>
             <a:ext cx="8162544" cy="1584722"/>
           </a:xfrm>
           <a:prstGeom prst="rect">
@@ -3758,7 +3758,7 @@
                 <a:ea typeface="Arial" pitchFamily="34" charset="-122"/>
                 <a:cs typeface="Arial" pitchFamily="34" charset="-120"/>
               </a:rPr>
-              <a:t>Our own early-stopped student (4k rows x 2 ep., CPU) reaches F1 0.695 vs. the teacher's 0.752 — it does not match the teacher at this budget — but its identity FPR is 0.008, an order of magnitude BELOW the teacher's 0.087 and the lowest of any model here. H2 is rejected on fairness even at a tenth of the intended data. The cost appears elsewhere: leetspeak evasion 0.280 → 0.634.</a:t>
+              <a:t>Our own early-stopped student (4k rows x 2 ep., CPU) reaches F1 0.695 vs. the teacher's 0.752 — it does not match the teacher at this budget — but its identity FPR is 0.008, an order of magnitude BELOW the teacher's 0.087 and the lowest of any discriminating model. H2 is rejected on fairness even at a tenth of the intended data. The cost appears elsewhere: leetspeak evasion 0.280 → 0.634.</a:t>
             </a:r>
             <a:endParaRPr lang="en-US" sz="2100" dirty="0"/>
           </a:p>
@@ -3772,7 +3772,7 @@
         </p:nvSpPr>
         <p:spPr>
           <a:xfrm>
-            <a:off x="9410700" y="7521178"/>
+            <a:off x="9410700" y="6121178"/>
             <a:ext cx="8162544" cy="685800"/>
           </a:xfrm>
           <a:prstGeom prst="rect">
@@ -3813,7 +3813,7 @@
         </p:nvSpPr>
         <p:spPr>
           <a:xfrm>
-            <a:off x="9410700" y="8302228"/>
+            <a:off x="9410700" y="6902228"/>
             <a:ext cx="8162544" cy="1198066"/>
           </a:xfrm>
           <a:prstGeom prst="rect">
@@ -4130,7 +4130,7 @@
                 <a:ea typeface="Arial" pitchFamily="34" charset="-122"/>
                 <a:cs typeface="Arial" pitchFamily="34" charset="-120"/>
               </a:rPr>
-              <a:t>The encoder's real value is robustness, and it is earned rather than architectural. Both its advantages point at toxic-bert's training scale.</a:t>
+              <a:t>The encoder's evasion robustness is earned, not architectural. The generic bert-base-classifier, identical to toxic-bert, is nearly as easy to evade as the SVM and no fairer; both gaps point at toxic-bert's training scale.</a:t>
             </a:r>
             <a:endParaRPr lang="en-US" sz="2175" dirty="0"/>
           </a:p>
@@ -4144,7 +4144,7 @@
         </p:nvSpPr>
         <p:spPr>
           <a:xfrm>
-            <a:off x="952500" y="3970883"/>
+            <a:off x="952500" y="4120883"/>
             <a:ext cx="266700" cy="1198066"/>
           </a:xfrm>
           <a:prstGeom prst="rect">
@@ -4185,7 +4185,7 @@
         </p:nvSpPr>
         <p:spPr>
           <a:xfrm>
-            <a:off x="1371600" y="3970883"/>
+            <a:off x="1371600" y="4120883"/>
             <a:ext cx="7711250" cy="1198066"/>
           </a:xfrm>
           <a:prstGeom prst="rect">
@@ -4229,7 +4229,7 @@
         </p:nvSpPr>
         <p:spPr>
           <a:xfrm>
-            <a:off x="9429750" y="3970883"/>
+            <a:off x="9429750" y="4120883"/>
             <a:ext cx="266700" cy="1198066"/>
           </a:xfrm>
           <a:prstGeom prst="rect">
@@ -4270,7 +4270,7 @@
         </p:nvSpPr>
         <p:spPr>
           <a:xfrm>
-            <a:off x="9848850" y="3970883"/>
+            <a:off x="9848850" y="4120883"/>
             <a:ext cx="7711250" cy="1198066"/>
           </a:xfrm>
           <a:prstGeom prst="rect">
@@ -4314,8 +4314,8 @@
         </p:nvSpPr>
         <p:spPr>
           <a:xfrm>
-            <a:off x="952500" y="5473750"/>
-            <a:ext cx="266700" cy="2386608"/>
+            <a:off x="952500" y="5773750"/>
+            <a:ext cx="266700" cy="1350000"/>
           </a:xfrm>
           <a:prstGeom prst="rect">
             <a:avLst/>
@@ -4355,8 +4355,8 @@
         </p:nvSpPr>
         <p:spPr>
           <a:xfrm>
-            <a:off x="1371600" y="5473750"/>
-            <a:ext cx="7711250" cy="2386608"/>
+            <a:off x="1371600" y="5773750"/>
+            <a:ext cx="7711250" cy="1350000"/>
           </a:xfrm>
           <a:prstGeom prst="rect">
             <a:avLst/>
@@ -4385,7 +4385,7 @@
                 <a:ea typeface="Arial" pitchFamily="34" charset="-122"/>
                 <a:cs typeface="Arial" pitchFamily="34" charset="-120"/>
               </a:rPr>
-              <a:t>Compression preserved fairness but cost robustness. The soft-KD student is the fairest model measured (identity FPR 0.008 vs. the teacher's 0.087), yet more than twice as easy to evade. And “robust” is not one property: toxic-bert is hardest to evade AND among the easiest to trick into false alarms.</a:t>
+              <a:t>Compression preserved fairness but cost robustness. The soft-KD student is the fairest discriminating model (identity FPR 0.008 vs. its teacher's 0.087), yet more than twice as easy to evade.</a:t>
             </a:r>
             <a:endParaRPr lang="en-US" sz="2175" dirty="0"/>
           </a:p>
@@ -4393,14 +4393,99 @@
       </p:sp>
       <p:sp>
         <p:nvSpPr>
+          <p:cNvPr id="17" name="Text 15"/>
+          <p:cNvSpPr/>
+          <p:nvPr/>
+        </p:nvSpPr>
+        <p:spPr>
+          <a:xfrm>
+            <a:off x="952500" y="7526616"/>
+            <a:ext cx="266700" cy="1350000"/>
+          </a:xfrm>
+          <a:prstGeom prst="rect">
+            <a:avLst/>
+          </a:prstGeom>
+          <a:noFill/>
+          <a:ln/>
+        </p:spPr>
+        <p:txBody>
+          <a:bodyPr wrap="square" lIns="25400" tIns="25400" rIns="25400" bIns="25400" rtlCol="0" anchor="t">
+            <a:normAutofit/>
+          </a:bodyPr>
+          <a:lstStyle/>
+          <a:p>
+            <a:pPr algn="l" indent="0" marL="0">
+              <a:buNone/>
+            </a:pPr>
+            <a:r>
+              <a:rPr lang="en-US" sz="3000" dirty="0">
+                <a:solidFill>
+                  <a:srgbClr val="6AC9CE"/>
+                </a:solidFill>
+                <a:latin typeface="Georgia" pitchFamily="34" charset="0"/>
+                <a:ea typeface="Georgia" pitchFamily="34" charset="-122"/>
+                <a:cs typeface="Georgia" pitchFamily="34" charset="-120"/>
+              </a:rPr>
+              <a:t>6</a:t>
+            </a:r>
+            <a:endParaRPr lang="en-US" sz="3000" dirty="0"/>
+          </a:p>
+        </p:txBody>
+      </p:sp>
+      <p:sp>
+        <p:nvSpPr>
+          <p:cNvPr id="18" name="Text 16"/>
+          <p:cNvSpPr/>
+          <p:nvPr/>
+        </p:nvSpPr>
+        <p:spPr>
+          <a:xfrm>
+            <a:off x="1371600" y="7526616"/>
+            <a:ext cx="7711250" cy="1350000"/>
+          </a:xfrm>
+          <a:prstGeom prst="rect">
+            <a:avLst/>
+          </a:prstGeom>
+          <a:noFill/>
+          <a:ln/>
+        </p:spPr>
+        <p:txBody>
+          <a:bodyPr wrap="square" lIns="25400" tIns="25400" rIns="25400" bIns="25400" rtlCol="0" anchor="t">
+            <a:normAutofit/>
+          </a:bodyPr>
+          <a:lstStyle/>
+          <a:p>
+            <a:pPr algn="l" indent="0" marL="0">
+              <a:lnSpc>
+                <a:spcPct val="123030"/>
+              </a:lnSpc>
+              <a:buNone/>
+            </a:pPr>
+            <a:r>
+              <a:rPr lang="en-US" sz="2175" dirty="0">
+                <a:solidFill>
+                  <a:srgbClr val="F5F3F0"/>
+                </a:solidFill>
+                <a:latin typeface="Arial" pitchFamily="34" charset="0"/>
+                <a:ea typeface="Arial" pitchFamily="34" charset="-122"/>
+                <a:cs typeface="Arial" pitchFamily="34" charset="-120"/>
+              </a:rPr>
+              <a:t>“Robust” is not one property. toxic-bert is the hardest model to evade and among the easiest to push into false alarms (65–91% vs. an 11% baseline); the SVM is the mirror image.</a:t>
+            </a:r>
+            <a:endParaRPr lang="en-US" sz="2175" dirty="0"/>
+          </a:p>
+        </p:txBody>
+      </p:sp>
+      <p:sp>
+        <p:nvSpPr>
           <p:cNvPr id="14" name="Shape 12"/>
           <p:cNvSpPr/>
           <p:nvPr/>
         </p:nvSpPr>
         <p:spPr>
           <a:xfrm>
-            <a:off x="9429750" y="5473750"/>
-            <a:ext cx="7905750" cy="2348508"/>
+            <a:off x="9429750" y="5773750"/>
+            <a:ext cx="7905750" cy="2700000"/>
           </a:xfrm>
           <a:prstGeom prst="rect">
             <a:avLst/>
@@ -4419,7 +4504,7 @@
         </p:nvSpPr>
         <p:spPr>
           <a:xfrm>
-            <a:off x="9734550" y="5740450"/>
+            <a:off x="9734550" y="6040450"/>
             <a:ext cx="8025765" cy="333375"/>
           </a:xfrm>
           <a:prstGeom prst="rect">
@@ -4460,7 +4545,7 @@
         </p:nvSpPr>
         <p:spPr>
           <a:xfrm>
-            <a:off x="9734550" y="6169075"/>
+            <a:off x="9734550" y="6469075"/>
             <a:ext cx="7515035" cy="1424583"/>
           </a:xfrm>
           <a:prstGeom prst="rect">
@@ -4490,7 +4575,7 @@
                 <a:ea typeface="Arial" pitchFamily="34" charset="-122"/>
                 <a:cs typeface="Arial" pitchFamily="34" charset="-120"/>
               </a:rPr>
-              <a:t>Headline numbers use an 800-comment subset without confidence intervals; S1 and D1-ft are early-stopped checkpoints (a full-scale run is ~25 h of CPU each); the perturbation suite is n=100, except D1-ft at n=25; the fairness probe is synthetic; evaluation is in-domain Wikipedia text; hateBERT was not run.</a:t>
+              <a:t>Headline numbers use an 800-comment subset, with confidence intervals only for the fairness probe; S1 and D1-ft are early-stopped checkpoints (a full-scale run is ~25 h of CPU each); the perturbation suite is n=100, except D1-ft at n=25; the fairness probe is synthetic; evaluation is in-domain Wikipedia text; hateBERT was not run.</a:t>
             </a:r>
             <a:endParaRPr lang="en-US" sz="1950" dirty="0"/>
           </a:p>
@@ -7378,7 +7463,7 @@
                 <a:ea typeface="Arial" pitchFamily="34" charset="-122"/>
                 <a:cs typeface="Arial" pitchFamily="34" charset="-120"/>
               </a:rPr>
-              <a:t>D1 fine-tuned on answer tokens, 20k / 4 ep.</a:t>
+              <a:t>D1 fine-tuned on answer token · Colab 20k×4; local 800×2</a:t>
             </a:r>
             <a:endParaRPr lang="en-US" sz="2025" dirty="0"/>
           </a:p>
@@ -7683,7 +7768,7 @@
                 <a:ea typeface="Arial" pitchFamily="34" charset="-122"/>
                 <a:cs typeface="Arial" pitchFamily="34" charset="-120"/>
               </a:rPr>
-              <a:t>Soft-KD from E2 · T = 2, α = 0.7</a:t>
+              <a:t>KD from E2, T = 2, α = 0.7 · Colab 20k×4; local 4k×2</a:t>
             </a:r>
             <a:endParaRPr lang="en-US" sz="2025" dirty="0"/>
           </a:p>
@@ -14496,7 +14581,7 @@
             <a:r>
               <a:rPr lang="en-US" sz="2025" dirty="0">
                 <a:solidFill>
-                  <a:srgbClr val="8A857C"/>
+                  <a:srgbClr val="1A1917"/>
                 </a:solidFill>
                 <a:latin typeface="Courier New" pitchFamily="34" charset="0"/>
                 <a:ea typeface="Courier New" pitchFamily="34" charset="-122"/>
@@ -14530,14 +14615,34 @@
       </p:sp>
       <p:sp>
         <p:nvSpPr>
-          <p:cNvPr id="34" name="Text 32"/>
-          <p:cNvSpPr/>
-          <p:nvPr/>
-        </p:nvSpPr>
-        <p:spPr>
-          <a:xfrm>
-            <a:off x="3543300" y="6468517"/>
-            <a:ext cx="470595" cy="323850"/>
+          <p:cNvPr id="44" name="Bar 0.008"/>
+          <p:cNvSpPr/>
+          <p:nvPr/>
+        </p:nvSpPr>
+        <p:spPr>
+          <a:xfrm>
+            <a:off x="3409950" y="6458992"/>
+            <a:ext cx="30000" cy="304800"/>
+          </a:xfrm>
+          <a:prstGeom prst="rect">
+            <a:avLst/>
+          </a:prstGeom>
+          <a:solidFill>
+            <a:srgbClr val="00939A"/>
+          </a:solidFill>
+          <a:ln/>
+        </p:spPr>
+      </p:sp>
+      <p:sp>
+        <p:nvSpPr>
+          <p:cNvPr id="45" name="Val 0.008"/>
+          <p:cNvSpPr/>
+          <p:nvPr/>
+        </p:nvSpPr>
+        <p:spPr>
+          <a:xfrm>
+            <a:off x="7156103" y="6463755"/>
+            <a:ext cx="933450" cy="333375"/>
           </a:xfrm>
           <a:prstGeom prst="rect">
             <a:avLst/>
@@ -14555,96 +14660,96 @@
               <a:buNone/>
             </a:pPr>
             <a:r>
-              <a:rPr lang="en-US" sz="1725" dirty="0">
+              <a:rPr lang="en-US" sz="2025" dirty="0">
+                <a:solidFill>
+                  <a:srgbClr val="1A1917"/>
+                </a:solidFill>
+                <a:latin typeface="Arial" pitchFamily="34" charset="0"/>
+                <a:ea typeface="Arial" pitchFamily="34" charset="-122"/>
+                <a:cs typeface="Arial" pitchFamily="34" charset="-120"/>
+              </a:rPr>
+              <a:t>0.008</a:t>
+            </a:r>
+            <a:endParaRPr lang="en-US" sz="2025" dirty="0"/>
+          </a:p>
+        </p:txBody>
+      </p:sp>
+      <p:sp>
+        <p:nvSpPr>
+          <p:cNvPr id="46" name="Ctl 0.008"/>
+          <p:cNvSpPr/>
+          <p:nvPr/>
+        </p:nvSpPr>
+        <p:spPr>
+          <a:xfrm>
+            <a:off x="7994303" y="6463755"/>
+            <a:ext cx="2095500" cy="333375"/>
+          </a:xfrm>
+          <a:prstGeom prst="rect">
+            <a:avLst/>
+          </a:prstGeom>
+          <a:noFill/>
+          <a:ln/>
+        </p:spPr>
+        <p:txBody>
+          <a:bodyPr wrap="square" lIns="25400" tIns="25400" rIns="25400" bIns="25400" rtlCol="0" anchor="t">
+            <a:normAutofit/>
+          </a:bodyPr>
+          <a:lstStyle/>
+          <a:p>
+            <a:pPr algn="r" indent="0" marL="0">
+              <a:buNone/>
+            </a:pPr>
+            <a:r>
+              <a:rPr lang="en-US" sz="2025" dirty="0">
                 <a:solidFill>
                   <a:srgbClr val="8A857C"/>
+                </a:solidFill>
+                <a:latin typeface="Arial" pitchFamily="34" charset="0"/>
+                <a:ea typeface="Arial" pitchFamily="34" charset="-122"/>
+                <a:cs typeface="Arial" pitchFamily="34" charset="-120"/>
+              </a:rPr>
+              <a:t>0.000</a:t>
+            </a:r>
+            <a:endParaRPr lang="en-US" sz="2025" dirty="0"/>
+          </a:p>
+        </p:txBody>
+      </p:sp>
+      <p:sp>
+        <p:nvSpPr>
+          <p:cNvPr id="36" name="Text 34"/>
+          <p:cNvSpPr/>
+          <p:nvPr/>
+        </p:nvSpPr>
+        <p:spPr>
+          <a:xfrm>
+            <a:off x="952500" y="7154317"/>
+            <a:ext cx="2362200" cy="704850"/>
+          </a:xfrm>
+          <a:prstGeom prst="rect">
+            <a:avLst/>
+          </a:prstGeom>
+          <a:noFill/>
+          <a:ln/>
+        </p:spPr>
+        <p:txBody>
+          <a:bodyPr wrap="square" lIns="25400" tIns="25400" rIns="25400" bIns="25400" rtlCol="0" anchor="t">
+            <a:normAutofit/>
+          </a:bodyPr>
+          <a:lstStyle/>
+          <a:p>
+            <a:pPr algn="l" indent="0" marL="0">
+              <a:buNone/>
+            </a:pPr>
+            <a:r>
+              <a:rPr lang="en-US" sz="2025" dirty="0">
+                <a:solidFill>
+                  <a:srgbClr val="1A1917"/>
                 </a:solidFill>
                 <a:latin typeface="Courier New" pitchFamily="34" charset="0"/>
                 <a:ea typeface="Courier New" pitchFamily="34" charset="-122"/>
                 <a:cs typeface="Courier New" pitchFamily="34" charset="-120"/>
               </a:rPr>
-              <a:t>0.008</a:t>
-            </a:r>
-            <a:endParaRPr lang="en-US" sz="1725" dirty="0"/>
-          </a:p>
-        </p:txBody>
-      </p:sp>
-      <p:sp>
-        <p:nvSpPr>
-          <p:cNvPr id="35" name="Text 33"/>
-          <p:cNvSpPr/>
-          <p:nvPr/>
-        </p:nvSpPr>
-        <p:spPr>
-          <a:xfrm>
-            <a:off x="7994303" y="6444704"/>
-            <a:ext cx="2095500" cy="371475"/>
-          </a:xfrm>
-          <a:prstGeom prst="rect">
-            <a:avLst/>
-          </a:prstGeom>
-          <a:noFill/>
-          <a:ln/>
-        </p:spPr>
-        <p:txBody>
-          <a:bodyPr wrap="square" lIns="25400" tIns="25400" rIns="25400" bIns="25400" rtlCol="0" anchor="t">
-            <a:normAutofit/>
-          </a:bodyPr>
-          <a:lstStyle/>
-          <a:p>
-            <a:pPr algn="r" indent="0" marL="0">
-              <a:buNone/>
-            </a:pPr>
-            <a:r>
-              <a:rPr lang="en-US" sz="2025" dirty="0">
-                <a:solidFill>
-                  <a:srgbClr val="8A857C"/>
-                </a:solidFill>
-                <a:latin typeface="Courier New" pitchFamily="34" charset="0"/>
-                <a:ea typeface="Courier New" pitchFamily="34" charset="-122"/>
-                <a:cs typeface="Courier New" pitchFamily="34" charset="-120"/>
-              </a:rPr>
-              <a:t>0.000</a:t>
-            </a:r>
-            <a:endParaRPr lang="en-US" sz="2025" dirty="0"/>
-          </a:p>
-        </p:txBody>
-      </p:sp>
-      <p:sp>
-        <p:nvSpPr>
-          <p:cNvPr id="36" name="Text 34"/>
-          <p:cNvSpPr/>
-          <p:nvPr/>
-        </p:nvSpPr>
-        <p:spPr>
-          <a:xfrm>
-            <a:off x="952500" y="7154317"/>
-            <a:ext cx="2362200" cy="704850"/>
-          </a:xfrm>
-          <a:prstGeom prst="rect">
-            <a:avLst/>
-          </a:prstGeom>
-          <a:noFill/>
-          <a:ln/>
-        </p:spPr>
-        <p:txBody>
-          <a:bodyPr wrap="square" lIns="25400" tIns="25400" rIns="25400" bIns="25400" rtlCol="0" anchor="t">
-            <a:normAutofit/>
-          </a:bodyPr>
-          <a:lstStyle/>
-          <a:p>
-            <a:pPr algn="l" indent="0" marL="0">
-              <a:buNone/>
-            </a:pPr>
-            <a:r>
-              <a:rPr lang="en-US" sz="2025" dirty="0">
-                <a:solidFill>
-                  <a:srgbClr val="8A857C"/>
-                </a:solidFill>
-                <a:latin typeface="Courier New" pitchFamily="34" charset="0"/>
-                <a:ea typeface="Courier New" pitchFamily="34" charset="-122"/>
-                <a:cs typeface="Courier New" pitchFamily="34" charset="-120"/>
-              </a:rPr>
               <a:t>distilgpt2-d1-ft</a:t>
             </a:r>
             <a:endParaRPr lang="en-US" sz="2025" dirty="0"/>
@@ -14673,14 +14778,34 @@
       </p:sp>
       <p:sp>
         <p:nvSpPr>
-          <p:cNvPr id="38" name="Text 36"/>
-          <p:cNvSpPr/>
-          <p:nvPr/>
-        </p:nvSpPr>
-        <p:spPr>
-          <a:xfrm>
-            <a:off x="3543300" y="7344817"/>
-            <a:ext cx="470595" cy="323850"/>
+          <p:cNvPr id="47" name="Bar 0.326"/>
+          <p:cNvSpPr/>
+          <p:nvPr/>
+        </p:nvSpPr>
+        <p:spPr>
+          <a:xfrm>
+            <a:off x="3409950" y="7335292"/>
+            <a:ext cx="1171563" cy="304800"/>
+          </a:xfrm>
+          <a:prstGeom prst="rect">
+            <a:avLst/>
+          </a:prstGeom>
+          <a:solidFill>
+            <a:srgbClr val="B8B3AA"/>
+          </a:solidFill>
+          <a:ln/>
+        </p:spPr>
+      </p:sp>
+      <p:sp>
+        <p:nvSpPr>
+          <p:cNvPr id="48" name="Val 0.326"/>
+          <p:cNvSpPr/>
+          <p:nvPr/>
+        </p:nvSpPr>
+        <p:spPr>
+          <a:xfrm>
+            <a:off x="7156103" y="7340055"/>
+            <a:ext cx="933450" cy="333375"/>
           </a:xfrm>
           <a:prstGeom prst="rect">
             <a:avLst/>
@@ -14698,54 +14823,54 @@
               <a:buNone/>
             </a:pPr>
             <a:r>
-              <a:rPr lang="en-US" sz="1725" dirty="0">
+              <a:rPr lang="en-US" sz="2025" dirty="0">
+                <a:solidFill>
+                  <a:srgbClr val="1A1917"/>
+                </a:solidFill>
+                <a:latin typeface="Arial" pitchFamily="34" charset="0"/>
+                <a:ea typeface="Arial" pitchFamily="34" charset="-122"/>
+                <a:cs typeface="Arial" pitchFamily="34" charset="-120"/>
+              </a:rPr>
+              <a:t>0.326</a:t>
+            </a:r>
+            <a:endParaRPr lang="en-US" sz="2025" dirty="0"/>
+          </a:p>
+        </p:txBody>
+      </p:sp>
+      <p:sp>
+        <p:nvSpPr>
+          <p:cNvPr id="49" name="Ctl 0.326"/>
+          <p:cNvSpPr/>
+          <p:nvPr/>
+        </p:nvSpPr>
+        <p:spPr>
+          <a:xfrm>
+            <a:off x="7994303" y="7340055"/>
+            <a:ext cx="2095500" cy="333375"/>
+          </a:xfrm>
+          <a:prstGeom prst="rect">
+            <a:avLst/>
+          </a:prstGeom>
+          <a:noFill/>
+          <a:ln/>
+        </p:spPr>
+        <p:txBody>
+          <a:bodyPr wrap="square" lIns="25400" tIns="25400" rIns="25400" bIns="25400" rtlCol="0" anchor="t">
+            <a:normAutofit/>
+          </a:bodyPr>
+          <a:lstStyle/>
+          <a:p>
+            <a:pPr algn="r" indent="0" marL="0">
+              <a:buNone/>
+            </a:pPr>
+            <a:r>
+              <a:rPr lang="en-US" sz="2025" dirty="0">
                 <a:solidFill>
                   <a:srgbClr val="8A857C"/>
                 </a:solidFill>
-                <a:latin typeface="Courier New" pitchFamily="34" charset="0"/>
-                <a:ea typeface="Courier New" pitchFamily="34" charset="-122"/>
-                <a:cs typeface="Courier New" pitchFamily="34" charset="-120"/>
-              </a:rPr>
-              <a:t>0.326</a:t>
-            </a:r>
-            <a:endParaRPr lang="en-US" sz="1725" dirty="0"/>
-          </a:p>
-        </p:txBody>
-      </p:sp>
-      <p:sp>
-        <p:nvSpPr>
-          <p:cNvPr id="39" name="Text 37"/>
-          <p:cNvSpPr/>
-          <p:nvPr/>
-        </p:nvSpPr>
-        <p:spPr>
-          <a:xfrm>
-            <a:off x="7994303" y="7321004"/>
-            <a:ext cx="2095500" cy="371475"/>
-          </a:xfrm>
-          <a:prstGeom prst="rect">
-            <a:avLst/>
-          </a:prstGeom>
-          <a:noFill/>
-          <a:ln/>
-        </p:spPr>
-        <p:txBody>
-          <a:bodyPr wrap="square" lIns="25400" tIns="25400" rIns="25400" bIns="25400" rtlCol="0" anchor="t">
-            <a:normAutofit/>
-          </a:bodyPr>
-          <a:lstStyle/>
-          <a:p>
-            <a:pPr algn="r" indent="0" marL="0">
-              <a:buNone/>
-            </a:pPr>
-            <a:r>
-              <a:rPr lang="en-US" sz="2025" dirty="0">
-                <a:solidFill>
-                  <a:srgbClr val="8A857C"/>
-                </a:solidFill>
-                <a:latin typeface="Courier New" pitchFamily="34" charset="0"/>
-                <a:ea typeface="Courier New" pitchFamily="34" charset="-122"/>
-                <a:cs typeface="Courier New" pitchFamily="34" charset="-120"/>
+                <a:latin typeface="Arial" pitchFamily="34" charset="0"/>
+                <a:ea typeface="Arial" pitchFamily="34" charset="-122"/>
+                <a:cs typeface="Arial" pitchFamily="34" charset="-120"/>
               </a:rPr>
               <a:t>0.000</a:t>
             </a:r>
@@ -14899,7 +15024,7 @@
                 <a:ea typeface="Arial" pitchFamily="34" charset="-122"/>
                 <a:cs typeface="Arial" pitchFamily="34" charset="-120"/>
               </a:rPr>
-              <a:t>The specialised encoder is less fair than the linear baseline, supporting H1. But our generic E1 is less fair still on the identical architecture, so specialisation alone does not explain the ordering.</a:t>
+              <a:t>The specialised encoder over-flags more than the linear baseline (0.087 vs. 0.049): the direction H1 predicts, but only marginally (p ≈ 0.06). Our generic E1 is no fairer (0.103, p ≈ 0.5), so specialisation alone does not explain the ordering.</a:t>
             </a:r>
             <a:endParaRPr lang="en-US" sz="2100" dirty="0"/>
           </a:p>
@@ -15912,7 +16037,7 @@
                 <a:ea typeface="Arial" pitchFamily="34" charset="-122"/>
                 <a:cs typeface="Arial" pitchFamily="34" charset="-120"/>
               </a:rPr>
-              <a:t>0.151</a:t>
+              <a:t>0.150</a:t>
             </a:r>
             <a:endParaRPr lang="en-US" sz="1875" dirty="0"/>
           </a:p>
@@ -16128,7 +16253,7 @@
               <a:buNone/>
             </a:pPr>
             <a:r>
-              <a:rPr lang="en-US" sz="3300" dirty="0">
+              <a:rPr lang="en-US" sz="2600" dirty="0">
                 <a:solidFill>
                   <a:srgbClr val="F5F3F0"/>
                 </a:solidFill>
@@ -16138,7 +16263,7 @@
               </a:rPr>
               <a:t>E2 0.930</a:t>
             </a:r>
-            <a:endParaRPr lang="en-US" sz="3300" dirty="0"/>
+            <a:endParaRPr lang="en-US" sz="2600" dirty="0"/>
           </a:p>
         </p:txBody>
       </p:sp>
@@ -16169,7 +16294,7 @@
               <a:buNone/>
             </a:pPr>
             <a:r>
-              <a:rPr lang="en-US" sz="3300" dirty="0">
+              <a:rPr lang="en-US" sz="2600" dirty="0">
                 <a:solidFill>
                   <a:srgbClr val="F5F3F0"/>
                 </a:solidFill>
@@ -16179,7 +16304,7 @@
               </a:rPr>
               <a:t>E1 0.890</a:t>
             </a:r>
-            <a:endParaRPr lang="en-US" sz="3300" dirty="0"/>
+            <a:endParaRPr lang="en-US" sz="2600" dirty="0"/>
           </a:p>
         </p:txBody>
       </p:sp>
@@ -16210,7 +16335,7 @@
               <a:buNone/>
             </a:pPr>
             <a:r>
-              <a:rPr lang="en-US" sz="3300" dirty="0">
+              <a:rPr lang="en-US" sz="2600" dirty="0">
                 <a:solidFill>
                   <a:srgbClr val="CFCABF"/>
                 </a:solidFill>
@@ -16220,7 +16345,7 @@
               </a:rPr>
               <a:t>E0 0.760</a:t>
             </a:r>
-            <a:endParaRPr lang="en-US" sz="3300" dirty="0"/>
+            <a:endParaRPr lang="en-US" sz="2600" dirty="0"/>
           </a:p>
         </p:txBody>
       </p:sp>
@@ -16251,7 +16376,7 @@
               <a:buNone/>
             </a:pPr>
             <a:r>
-              <a:rPr lang="en-US" sz="3300" dirty="0">
+              <a:rPr lang="en-US" sz="2600" dirty="0">
                 <a:solidFill>
                   <a:srgbClr val="CFCABF"/>
                 </a:solidFill>
@@ -16261,7 +16386,7 @@
               </a:rPr>
               <a:t>D1 0.580</a:t>
             </a:r>
-            <a:endParaRPr lang="en-US" sz="3300" dirty="0"/>
+            <a:endParaRPr lang="en-US" sz="2600" dirty="0"/>
           </a:p>
         </p:txBody>
       </p:sp>
@@ -16347,7 +16472,7 @@
                 <a:ea typeface="Arial" pitchFamily="34" charset="-122"/>
                 <a:cs typeface="Arial" pitchFamily="34" charset="-120"/>
               </a:rPr>
-              <a:t>E1 is the informative result — identical architecture, parameters and pretraining to toxic-bert, yet nearly as brittle as the bag of words. And the distilled student S1 is worse still (leetspeak 0.634 vs. its teacher's 0.280): distillation transferred the teacher's fairness but not its robustness — the KD loss only ever sees unperturbed text.</a:t>
+              <a:t>E1 is the informative result — identical architecture, parameters and pretraining to toxic-bert, yet nearly as brittle as the bag of words. And the distilled student S1 is more than twice as easy to evade as its teacher (leetspeak 0.634 vs. 0.280): distillation transferred fairness but not robustness — plausibly because the KD loss only sees unperturbed text.</a:t>
             </a:r>
             <a:endParaRPr lang="en-US" sz="2100" dirty="0"/>
           </a:p>
